--- a/gallery/pptx/fixtures/04-multi.pptx
+++ b/gallery/pptx/fixtures/04-multi.pptx
@@ -116,7 +116,7 @@
                 </a:solidFill>
                 <a:latin typeface="Calibri"/>
               </a:rPr>
-              <a:t>Slide 1 of 2</a:t>
+              <a:t xml:space="preserve">Slide 1 of 2</a:t>
             </a:r>
           </a:p>
         </p:txBody>
@@ -174,7 +174,7 @@
                 </a:solidFill>
                 <a:latin typeface="Calibri"/>
               </a:rPr>
-              <a:t>Slide 2 of 2</a:t>
+              <a:t xml:space="preserve">Slide 2 of 2</a:t>
             </a:r>
           </a:p>
         </p:txBody>
